--- a/docs/05 Agentic AI and ADLC.pptx
+++ b/docs/05 Agentic AI and ADLC.pptx
@@ -18,9 +18,9 @@
     <p:sldId id="283" r:id="rId12"/>
     <p:sldId id="284" r:id="rId13"/>
     <p:sldId id="285" r:id="rId14"/>
-    <p:sldId id="286" r:id="rId15"/>
-    <p:sldId id="295" r:id="rId16"/>
-    <p:sldId id="273" r:id="rId17"/>
+    <p:sldId id="295" r:id="rId15"/>
+    <p:sldId id="273" r:id="rId16"/>
+    <p:sldId id="286" r:id="rId17"/>
     <p:sldId id="261" r:id="rId18"/>
     <p:sldId id="276" r:id="rId19"/>
     <p:sldId id="287" r:id="rId20"/>
@@ -287,7 +287,7 @@
           <a:p>
             <a:fld id="{CF9BD994-088D-4DFC-A63A-488DD3725837}" type="datetimeFigureOut">
               <a:rPr lang="en-IN" smtClean="0"/>
-              <a:t>02-04-2026</a:t>
+              <a:t>13-05-2026</a:t>
             </a:fld>
             <a:endParaRPr lang="en-IN"/>
           </a:p>
@@ -487,7 +487,7 @@
           <a:p>
             <a:fld id="{CF9BD994-088D-4DFC-A63A-488DD3725837}" type="datetimeFigureOut">
               <a:rPr lang="en-IN" smtClean="0"/>
-              <a:t>02-04-2026</a:t>
+              <a:t>13-05-2026</a:t>
             </a:fld>
             <a:endParaRPr lang="en-IN"/>
           </a:p>
@@ -697,7 +697,7 @@
           <a:p>
             <a:fld id="{CF9BD994-088D-4DFC-A63A-488DD3725837}" type="datetimeFigureOut">
               <a:rPr lang="en-IN" smtClean="0"/>
-              <a:t>02-04-2026</a:t>
+              <a:t>13-05-2026</a:t>
             </a:fld>
             <a:endParaRPr lang="en-IN"/>
           </a:p>
@@ -919,7 +919,7 @@
           <a:p>
             <a:fld id="{4F816CEB-1072-4B22-A473-588D7AF62EB2}" type="datetimeFigureOut">
               <a:rPr lang="en-IN" smtClean="0"/>
-              <a:t>02-04-2026</a:t>
+              <a:t>13-05-2026</a:t>
             </a:fld>
             <a:endParaRPr lang="en-IN"/>
           </a:p>
@@ -1119,7 +1119,7 @@
           <a:p>
             <a:fld id="{4F816CEB-1072-4B22-A473-588D7AF62EB2}" type="datetimeFigureOut">
               <a:rPr lang="en-IN" smtClean="0"/>
-              <a:t>02-04-2026</a:t>
+              <a:t>13-05-2026</a:t>
             </a:fld>
             <a:endParaRPr lang="en-IN"/>
           </a:p>
@@ -1395,7 +1395,7 @@
           <a:p>
             <a:fld id="{4F816CEB-1072-4B22-A473-588D7AF62EB2}" type="datetimeFigureOut">
               <a:rPr lang="en-IN" smtClean="0"/>
-              <a:t>02-04-2026</a:t>
+              <a:t>13-05-2026</a:t>
             </a:fld>
             <a:endParaRPr lang="en-IN"/>
           </a:p>
@@ -1663,7 +1663,7 @@
           <a:p>
             <a:fld id="{4F816CEB-1072-4B22-A473-588D7AF62EB2}" type="datetimeFigureOut">
               <a:rPr lang="en-IN" smtClean="0"/>
-              <a:t>02-04-2026</a:t>
+              <a:t>13-05-2026</a:t>
             </a:fld>
             <a:endParaRPr lang="en-IN"/>
           </a:p>
@@ -2078,7 +2078,7 @@
           <a:p>
             <a:fld id="{4F816CEB-1072-4B22-A473-588D7AF62EB2}" type="datetimeFigureOut">
               <a:rPr lang="en-IN" smtClean="0"/>
-              <a:t>02-04-2026</a:t>
+              <a:t>13-05-2026</a:t>
             </a:fld>
             <a:endParaRPr lang="en-IN"/>
           </a:p>
@@ -2220,7 +2220,7 @@
           <a:p>
             <a:fld id="{4F816CEB-1072-4B22-A473-588D7AF62EB2}" type="datetimeFigureOut">
               <a:rPr lang="en-IN" smtClean="0"/>
-              <a:t>02-04-2026</a:t>
+              <a:t>13-05-2026</a:t>
             </a:fld>
             <a:endParaRPr lang="en-IN"/>
           </a:p>
@@ -2333,7 +2333,7 @@
           <a:p>
             <a:fld id="{4F816CEB-1072-4B22-A473-588D7AF62EB2}" type="datetimeFigureOut">
               <a:rPr lang="en-IN" smtClean="0"/>
-              <a:t>02-04-2026</a:t>
+              <a:t>13-05-2026</a:t>
             </a:fld>
             <a:endParaRPr lang="en-IN"/>
           </a:p>
@@ -2646,7 +2646,7 @@
           <a:p>
             <a:fld id="{4F816CEB-1072-4B22-A473-588D7AF62EB2}" type="datetimeFigureOut">
               <a:rPr lang="en-IN" smtClean="0"/>
-              <a:t>02-04-2026</a:t>
+              <a:t>13-05-2026</a:t>
             </a:fld>
             <a:endParaRPr lang="en-IN"/>
           </a:p>
@@ -2846,7 +2846,7 @@
           <a:p>
             <a:fld id="{CF9BD994-088D-4DFC-A63A-488DD3725837}" type="datetimeFigureOut">
               <a:rPr lang="en-IN" smtClean="0"/>
-              <a:t>02-04-2026</a:t>
+              <a:t>13-05-2026</a:t>
             </a:fld>
             <a:endParaRPr lang="en-IN"/>
           </a:p>
@@ -3135,7 +3135,7 @@
           <a:p>
             <a:fld id="{4F816CEB-1072-4B22-A473-588D7AF62EB2}" type="datetimeFigureOut">
               <a:rPr lang="en-IN" smtClean="0"/>
-              <a:t>02-04-2026</a:t>
+              <a:t>13-05-2026</a:t>
             </a:fld>
             <a:endParaRPr lang="en-IN"/>
           </a:p>
@@ -3335,7 +3335,7 @@
           <a:p>
             <a:fld id="{4F816CEB-1072-4B22-A473-588D7AF62EB2}" type="datetimeFigureOut">
               <a:rPr lang="en-IN" smtClean="0"/>
-              <a:t>02-04-2026</a:t>
+              <a:t>13-05-2026</a:t>
             </a:fld>
             <a:endParaRPr lang="en-IN"/>
           </a:p>
@@ -3545,7 +3545,7 @@
           <a:p>
             <a:fld id="{4F816CEB-1072-4B22-A473-588D7AF62EB2}" type="datetimeFigureOut">
               <a:rPr lang="en-IN" smtClean="0"/>
-              <a:t>02-04-2026</a:t>
+              <a:t>13-05-2026</a:t>
             </a:fld>
             <a:endParaRPr lang="en-IN"/>
           </a:p>
@@ -3931,7 +3931,7 @@
           <a:p>
             <a:fld id="{CF9BD994-088D-4DFC-A63A-488DD3725837}" type="datetimeFigureOut">
               <a:rPr lang="en-IN" smtClean="0"/>
-              <a:t>02-04-2026</a:t>
+              <a:t>13-05-2026</a:t>
             </a:fld>
             <a:endParaRPr lang="en-IN"/>
           </a:p>
@@ -4199,7 +4199,7 @@
           <a:p>
             <a:fld id="{CF9BD994-088D-4DFC-A63A-488DD3725837}" type="datetimeFigureOut">
               <a:rPr lang="en-IN" smtClean="0"/>
-              <a:t>02-04-2026</a:t>
+              <a:t>13-05-2026</a:t>
             </a:fld>
             <a:endParaRPr lang="en-IN"/>
           </a:p>
@@ -4614,7 +4614,7 @@
           <a:p>
             <a:fld id="{CF9BD994-088D-4DFC-A63A-488DD3725837}" type="datetimeFigureOut">
               <a:rPr lang="en-IN" smtClean="0"/>
-              <a:t>02-04-2026</a:t>
+              <a:t>13-05-2026</a:t>
             </a:fld>
             <a:endParaRPr lang="en-IN"/>
           </a:p>
@@ -4756,7 +4756,7 @@
           <a:p>
             <a:fld id="{CF9BD994-088D-4DFC-A63A-488DD3725837}" type="datetimeFigureOut">
               <a:rPr lang="en-IN" smtClean="0"/>
-              <a:t>02-04-2026</a:t>
+              <a:t>13-05-2026</a:t>
             </a:fld>
             <a:endParaRPr lang="en-IN"/>
           </a:p>
@@ -4869,7 +4869,7 @@
           <a:p>
             <a:fld id="{CF9BD994-088D-4DFC-A63A-488DD3725837}" type="datetimeFigureOut">
               <a:rPr lang="en-IN" smtClean="0"/>
-              <a:t>02-04-2026</a:t>
+              <a:t>13-05-2026</a:t>
             </a:fld>
             <a:endParaRPr lang="en-IN"/>
           </a:p>
@@ -5182,7 +5182,7 @@
           <a:p>
             <a:fld id="{CF9BD994-088D-4DFC-A63A-488DD3725837}" type="datetimeFigureOut">
               <a:rPr lang="en-IN" smtClean="0"/>
-              <a:t>02-04-2026</a:t>
+              <a:t>13-05-2026</a:t>
             </a:fld>
             <a:endParaRPr lang="en-IN"/>
           </a:p>
@@ -5471,7 +5471,7 @@
           <a:p>
             <a:fld id="{CF9BD994-088D-4DFC-A63A-488DD3725837}" type="datetimeFigureOut">
               <a:rPr lang="en-IN" smtClean="0"/>
-              <a:t>02-04-2026</a:t>
+              <a:t>13-05-2026</a:t>
             </a:fld>
             <a:endParaRPr lang="en-IN"/>
           </a:p>
@@ -5714,7 +5714,7 @@
           <a:p>
             <a:fld id="{CF9BD994-088D-4DFC-A63A-488DD3725837}" type="datetimeFigureOut">
               <a:rPr lang="en-IN" smtClean="0"/>
-              <a:t>02-04-2026</a:t>
+              <a:t>13-05-2026</a:t>
             </a:fld>
             <a:endParaRPr lang="en-IN"/>
           </a:p>
@@ -6284,7 +6284,7 @@
           <a:p>
             <a:fld id="{4F816CEB-1072-4B22-A473-588D7AF62EB2}" type="datetimeFigureOut">
               <a:rPr lang="en-IN" smtClean="0"/>
-              <a:t>02-04-2026</a:t>
+              <a:t>13-05-2026</a:t>
             </a:fld>
             <a:endParaRPr lang="en-IN"/>
           </a:p>
@@ -7398,6 +7398,295 @@
           <p:cNvPr id="2" name="Title 1">
             <a:extLst>
               <a:ext uri="{FF2B5EF4-FFF2-40B4-BE49-F238E27FC236}">
+                <a16:creationId xmlns:a16="http://schemas.microsoft.com/office/drawing/2014/main" id="{317ABE98-D43A-2AB0-23F5-59C41529E48E}"/>
+              </a:ext>
+            </a:extLst>
+          </p:cNvPr>
+          <p:cNvSpPr>
+            <a:spLocks noGrp="1"/>
+          </p:cNvSpPr>
+          <p:nvPr>
+            <p:ph type="title"/>
+          </p:nvPr>
+        </p:nvSpPr>
+        <p:spPr/>
+        <p:txBody>
+          <a:bodyPr/>
+          <a:lstStyle/>
+          <a:p>
+            <a:r>
+              <a:rPr lang="en-US" dirty="0"/>
+              <a:t>Demo</a:t>
+            </a:r>
+            <a:endParaRPr lang="en-IN" dirty="0"/>
+          </a:p>
+        </p:txBody>
+      </p:sp>
+      <p:sp>
+        <p:nvSpPr>
+          <p:cNvPr id="3" name="Content Placeholder 2">
+            <a:extLst>
+              <a:ext uri="{FF2B5EF4-FFF2-40B4-BE49-F238E27FC236}">
+                <a16:creationId xmlns:a16="http://schemas.microsoft.com/office/drawing/2014/main" id="{ED19F528-6C96-2E7C-F08A-44A79F648282}"/>
+              </a:ext>
+            </a:extLst>
+          </p:cNvPr>
+          <p:cNvSpPr>
+            <a:spLocks noGrp="1"/>
+          </p:cNvSpPr>
+          <p:nvPr>
+            <p:ph idx="1"/>
+          </p:nvPr>
+        </p:nvSpPr>
+        <p:spPr/>
+        <p:txBody>
+          <a:bodyPr/>
+          <a:lstStyle/>
+          <a:p>
+            <a:r>
+              <a:rPr lang="en-US" dirty="0"/>
+              <a:t>Summarize</a:t>
+            </a:r>
+          </a:p>
+          <a:p>
+            <a:r>
+              <a:rPr lang="en-US" dirty="0"/>
+              <a:t>Extract insights</a:t>
+            </a:r>
+          </a:p>
+          <a:p>
+            <a:r>
+              <a:rPr lang="en-US" dirty="0"/>
+              <a:t>Recommendations</a:t>
+            </a:r>
+          </a:p>
+          <a:p>
+            <a:r>
+              <a:rPr lang="en-US" dirty="0"/>
+              <a:t>Agent Workflow – No Graph</a:t>
+            </a:r>
+          </a:p>
+          <a:p>
+            <a:r>
+              <a:rPr lang="en-US" dirty="0"/>
+              <a:t>Agent Workflow – Graph, Tools, Nodes</a:t>
+            </a:r>
+          </a:p>
+          <a:p>
+            <a:endParaRPr lang="en-US" dirty="0"/>
+          </a:p>
+          <a:p>
+            <a:endParaRPr lang="en-IN" dirty="0"/>
+          </a:p>
+        </p:txBody>
+      </p:sp>
+    </p:spTree>
+    <p:extLst>
+      <p:ext uri="{BB962C8B-B14F-4D97-AF65-F5344CB8AC3E}">
+        <p14:creationId xmlns:p14="http://schemas.microsoft.com/office/powerpoint/2010/main" val="3123159848"/>
+      </p:ext>
+    </p:extLst>
+  </p:cSld>
+  <p:clrMapOvr>
+    <a:masterClrMapping/>
+  </p:clrMapOvr>
+</p:sld>
+</file>
+
+<file path=ppt/slides/slide14.xml><?xml version="1.0" encoding="utf-8"?>
+<p:sld xmlns:a="http://schemas.openxmlformats.org/drawingml/2006/main" xmlns:r="http://schemas.openxmlformats.org/officeDocument/2006/relationships" xmlns:p="http://schemas.openxmlformats.org/presentationml/2006/main">
+  <p:cSld>
+    <p:bg>
+      <p:bgPr>
+        <a:solidFill>
+          <a:schemeClr val="bg1"/>
+        </a:solidFill>
+        <a:effectLst/>
+      </p:bgPr>
+    </p:bg>
+    <p:spTree>
+      <p:nvGrpSpPr>
+        <p:cNvPr id="1" name="">
+          <a:extLst>
+            <a:ext uri="{FF2B5EF4-FFF2-40B4-BE49-F238E27FC236}">
+              <a16:creationId xmlns:a16="http://schemas.microsoft.com/office/drawing/2014/main" id="{EFA60591-FF6C-0AC3-0377-8CE9A21C8166}"/>
+            </a:ext>
+          </a:extLst>
+        </p:cNvPr>
+        <p:cNvGrpSpPr/>
+        <p:nvPr/>
+      </p:nvGrpSpPr>
+      <p:grpSpPr>
+        <a:xfrm>
+          <a:off x="0" y="0"/>
+          <a:ext cx="0" cy="0"/>
+          <a:chOff x="0" y="0"/>
+          <a:chExt cx="0" cy="0"/>
+        </a:xfrm>
+      </p:grpSpPr>
+      <p:sp useBgFill="1">
+        <p:nvSpPr>
+          <p:cNvPr id="8" name="Rectangle 7">
+            <a:extLst>
+              <a:ext uri="{FF2B5EF4-FFF2-40B4-BE49-F238E27FC236}">
+                <a16:creationId xmlns:a16="http://schemas.microsoft.com/office/drawing/2014/main" id="{9EDC4742-3D24-FAE0-DDBF-4C813EE8A049}"/>
+              </a:ext>
+              <a:ext uri="{C183D7F6-B498-43B3-948B-1728B52AA6E4}">
+                <adec:decorative xmlns:adec="http://schemas.microsoft.com/office/drawing/2017/decorative" val="1"/>
+              </a:ext>
+            </a:extLst>
+          </p:cNvPr>
+          <p:cNvSpPr>
+            <a:spLocks noGrp="1" noRot="1" noChangeAspect="1" noMove="1" noResize="1" noEditPoints="1" noAdjustHandles="1" noChangeArrowheads="1" noChangeShapeType="1" noTextEdit="1"/>
+          </p:cNvSpPr>
+          <p:nvPr>
+            <p:extLst>
+              <p:ext uri="{386F3935-93C4-4BCD-93E2-E3B085C9AB24}">
+                <p16:designElem xmlns:p16="http://schemas.microsoft.com/office/powerpoint/2015/main" val="1"/>
+              </p:ext>
+            </p:extLst>
+          </p:nvPr>
+        </p:nvSpPr>
+        <p:spPr>
+          <a:xfrm>
+            <a:off x="0" y="0"/>
+            <a:ext cx="12192000" cy="6858000"/>
+          </a:xfrm>
+          <a:prstGeom prst="rect">
+            <a:avLst/>
+          </a:prstGeom>
+          <a:ln w="12700" cap="flat" cmpd="sng" algn="ctr">
+            <a:noFill/>
+            <a:prstDash val="solid"/>
+            <a:miter lim="800000"/>
+          </a:ln>
+          <a:effectLst/>
+        </p:spPr>
+        <p:style>
+          <a:lnRef idx="2">
+            <a:schemeClr val="accent1">
+              <a:shade val="15000"/>
+            </a:schemeClr>
+          </a:lnRef>
+          <a:fillRef idx="1">
+            <a:schemeClr val="accent1"/>
+          </a:fillRef>
+          <a:effectRef idx="0">
+            <a:schemeClr val="accent1"/>
+          </a:effectRef>
+          <a:fontRef idx="minor">
+            <a:schemeClr val="lt1"/>
+          </a:fontRef>
+        </p:style>
+        <p:txBody>
+          <a:bodyPr rtlCol="0" anchor="ctr"/>
+          <a:lstStyle/>
+          <a:p>
+            <a:pPr marL="0" marR="0" lvl="0" indent="0" algn="ctr" defTabSz="914400" rtl="0" eaLnBrk="1" fontAlgn="auto" latinLnBrk="0" hangingPunct="1">
+              <a:lnSpc>
+                <a:spcPct val="100000"/>
+              </a:lnSpc>
+              <a:spcBef>
+                <a:spcPts val="0"/>
+              </a:spcBef>
+              <a:spcAft>
+                <a:spcPts val="0"/>
+              </a:spcAft>
+              <a:buClrTx/>
+              <a:buSzTx/>
+              <a:buFontTx/>
+              <a:buNone/>
+              <a:tabLst/>
+              <a:defRPr/>
+            </a:pPr>
+            <a:endParaRPr kumimoji="0" lang="en-US" sz="1800" b="0" i="0" u="none" strike="noStrike" kern="1200" cap="none" spc="0" normalizeH="0" baseline="0" noProof="0">
+              <a:ln>
+                <a:noFill/>
+              </a:ln>
+              <a:solidFill>
+                <a:prstClr val="white"/>
+              </a:solidFill>
+              <a:effectLst/>
+              <a:uLnTx/>
+              <a:uFillTx/>
+              <a:latin typeface="Neue Haas Grotesk Text Pro"/>
+              <a:ea typeface="+mn-ea"/>
+              <a:cs typeface="+mn-cs"/>
+            </a:endParaRPr>
+          </a:p>
+        </p:txBody>
+      </p:sp>
+      <p:sp>
+        <p:nvSpPr>
+          <p:cNvPr id="2" name="Title 1">
+            <a:extLst>
+              <a:ext uri="{FF2B5EF4-FFF2-40B4-BE49-F238E27FC236}">
+                <a16:creationId xmlns:a16="http://schemas.microsoft.com/office/drawing/2014/main" id="{AD53C103-9948-FEF6-C6CB-380D247F6FEC}"/>
+              </a:ext>
+            </a:extLst>
+          </p:cNvPr>
+          <p:cNvSpPr>
+            <a:spLocks noGrp="1"/>
+          </p:cNvSpPr>
+          <p:nvPr>
+            <p:ph type="title"/>
+          </p:nvPr>
+        </p:nvSpPr>
+        <p:spPr>
+          <a:xfrm>
+            <a:off x="277091" y="1814321"/>
+            <a:ext cx="7772400" cy="4560920"/>
+          </a:xfrm>
+        </p:spPr>
+        <p:txBody>
+          <a:bodyPr vert="horz" lIns="91440" tIns="45720" rIns="91440" bIns="45720" rtlCol="0" anchor="b">
+            <a:normAutofit/>
+          </a:bodyPr>
+          <a:lstStyle/>
+          <a:p>
+            <a:r>
+              <a:rPr lang="en-IN" sz="8000" dirty="0"/>
+              <a:t>Agent-Driven Lifecycle (ADLC)</a:t>
+            </a:r>
+            <a:endParaRPr lang="en-US" sz="7400" b="1" dirty="0"/>
+          </a:p>
+        </p:txBody>
+      </p:sp>
+    </p:spTree>
+    <p:extLst>
+      <p:ext uri="{BB962C8B-B14F-4D97-AF65-F5344CB8AC3E}">
+        <p14:creationId xmlns:p14="http://schemas.microsoft.com/office/powerpoint/2010/main" val="1272057228"/>
+      </p:ext>
+    </p:extLst>
+  </p:cSld>
+  <p:clrMapOvr>
+    <a:overrideClrMapping bg1="dk1" tx1="lt1" bg2="dk2" tx2="lt2" accent1="accent1" accent2="accent2" accent3="accent3" accent4="accent4" accent5="accent5" accent6="accent6" hlink="hlink" folHlink="folHlink"/>
+  </p:clrMapOvr>
+</p:sld>
+</file>
+
+<file path=ppt/slides/slide15.xml><?xml version="1.0" encoding="utf-8"?>
+<p:sld xmlns:a="http://schemas.openxmlformats.org/drawingml/2006/main" xmlns:r="http://schemas.openxmlformats.org/officeDocument/2006/relationships" xmlns:p="http://schemas.openxmlformats.org/presentationml/2006/main">
+  <p:cSld>
+    <p:spTree>
+      <p:nvGrpSpPr>
+        <p:cNvPr id="1" name=""/>
+        <p:cNvGrpSpPr/>
+        <p:nvPr/>
+      </p:nvGrpSpPr>
+      <p:grpSpPr>
+        <a:xfrm>
+          <a:off x="0" y="0"/>
+          <a:ext cx="0" cy="0"/>
+          <a:chOff x="0" y="0"/>
+          <a:chExt cx="0" cy="0"/>
+        </a:xfrm>
+      </p:grpSpPr>
+      <p:sp>
+        <p:nvSpPr>
+          <p:cNvPr id="2" name="Title 1">
+            <a:extLst>
+              <a:ext uri="{FF2B5EF4-FFF2-40B4-BE49-F238E27FC236}">
                 <a16:creationId xmlns:a16="http://schemas.microsoft.com/office/drawing/2014/main" id="{D7C36422-742E-76E4-3D2A-7D48CAC72512}"/>
               </a:ext>
             </a:extLst>
@@ -7755,295 +8044,6 @@
   </p:cSld>
   <p:clrMapOvr>
     <a:masterClrMapping/>
-  </p:clrMapOvr>
-</p:sld>
-</file>
-
-<file path=ppt/slides/slide14.xml><?xml version="1.0" encoding="utf-8"?>
-<p:sld xmlns:a="http://schemas.openxmlformats.org/drawingml/2006/main" xmlns:r="http://schemas.openxmlformats.org/officeDocument/2006/relationships" xmlns:p="http://schemas.openxmlformats.org/presentationml/2006/main">
-  <p:cSld>
-    <p:spTree>
-      <p:nvGrpSpPr>
-        <p:cNvPr id="1" name=""/>
-        <p:cNvGrpSpPr/>
-        <p:nvPr/>
-      </p:nvGrpSpPr>
-      <p:grpSpPr>
-        <a:xfrm>
-          <a:off x="0" y="0"/>
-          <a:ext cx="0" cy="0"/>
-          <a:chOff x="0" y="0"/>
-          <a:chExt cx="0" cy="0"/>
-        </a:xfrm>
-      </p:grpSpPr>
-      <p:sp>
-        <p:nvSpPr>
-          <p:cNvPr id="2" name="Title 1">
-            <a:extLst>
-              <a:ext uri="{FF2B5EF4-FFF2-40B4-BE49-F238E27FC236}">
-                <a16:creationId xmlns:a16="http://schemas.microsoft.com/office/drawing/2014/main" id="{317ABE98-D43A-2AB0-23F5-59C41529E48E}"/>
-              </a:ext>
-            </a:extLst>
-          </p:cNvPr>
-          <p:cNvSpPr>
-            <a:spLocks noGrp="1"/>
-          </p:cNvSpPr>
-          <p:nvPr>
-            <p:ph type="title"/>
-          </p:nvPr>
-        </p:nvSpPr>
-        <p:spPr/>
-        <p:txBody>
-          <a:bodyPr/>
-          <a:lstStyle/>
-          <a:p>
-            <a:r>
-              <a:rPr lang="en-US" dirty="0"/>
-              <a:t>Demo</a:t>
-            </a:r>
-            <a:endParaRPr lang="en-IN" dirty="0"/>
-          </a:p>
-        </p:txBody>
-      </p:sp>
-      <p:sp>
-        <p:nvSpPr>
-          <p:cNvPr id="3" name="Content Placeholder 2">
-            <a:extLst>
-              <a:ext uri="{FF2B5EF4-FFF2-40B4-BE49-F238E27FC236}">
-                <a16:creationId xmlns:a16="http://schemas.microsoft.com/office/drawing/2014/main" id="{ED19F528-6C96-2E7C-F08A-44A79F648282}"/>
-              </a:ext>
-            </a:extLst>
-          </p:cNvPr>
-          <p:cNvSpPr>
-            <a:spLocks noGrp="1"/>
-          </p:cNvSpPr>
-          <p:nvPr>
-            <p:ph idx="1"/>
-          </p:nvPr>
-        </p:nvSpPr>
-        <p:spPr/>
-        <p:txBody>
-          <a:bodyPr/>
-          <a:lstStyle/>
-          <a:p>
-            <a:r>
-              <a:rPr lang="en-US" dirty="0"/>
-              <a:t>Summarize</a:t>
-            </a:r>
-          </a:p>
-          <a:p>
-            <a:r>
-              <a:rPr lang="en-US" dirty="0"/>
-              <a:t>Extract insights</a:t>
-            </a:r>
-          </a:p>
-          <a:p>
-            <a:r>
-              <a:rPr lang="en-US" dirty="0"/>
-              <a:t>Recommendations</a:t>
-            </a:r>
-          </a:p>
-          <a:p>
-            <a:r>
-              <a:rPr lang="en-US" dirty="0"/>
-              <a:t>Agent Workflow – No Graph</a:t>
-            </a:r>
-          </a:p>
-          <a:p>
-            <a:r>
-              <a:rPr lang="en-US" dirty="0"/>
-              <a:t>Agent Workflow – Graph, Tools, Nodes</a:t>
-            </a:r>
-          </a:p>
-          <a:p>
-            <a:endParaRPr lang="en-US" dirty="0"/>
-          </a:p>
-          <a:p>
-            <a:endParaRPr lang="en-IN" dirty="0"/>
-          </a:p>
-        </p:txBody>
-      </p:sp>
-    </p:spTree>
-    <p:extLst>
-      <p:ext uri="{BB962C8B-B14F-4D97-AF65-F5344CB8AC3E}">
-        <p14:creationId xmlns:p14="http://schemas.microsoft.com/office/powerpoint/2010/main" val="3123159848"/>
-      </p:ext>
-    </p:extLst>
-  </p:cSld>
-  <p:clrMapOvr>
-    <a:masterClrMapping/>
-  </p:clrMapOvr>
-</p:sld>
-</file>
-
-<file path=ppt/slides/slide15.xml><?xml version="1.0" encoding="utf-8"?>
-<p:sld xmlns:a="http://schemas.openxmlformats.org/drawingml/2006/main" xmlns:r="http://schemas.openxmlformats.org/officeDocument/2006/relationships" xmlns:p="http://schemas.openxmlformats.org/presentationml/2006/main">
-  <p:cSld>
-    <p:bg>
-      <p:bgPr>
-        <a:solidFill>
-          <a:schemeClr val="bg1"/>
-        </a:solidFill>
-        <a:effectLst/>
-      </p:bgPr>
-    </p:bg>
-    <p:spTree>
-      <p:nvGrpSpPr>
-        <p:cNvPr id="1" name="">
-          <a:extLst>
-            <a:ext uri="{FF2B5EF4-FFF2-40B4-BE49-F238E27FC236}">
-              <a16:creationId xmlns:a16="http://schemas.microsoft.com/office/drawing/2014/main" id="{EFA60591-FF6C-0AC3-0377-8CE9A21C8166}"/>
-            </a:ext>
-          </a:extLst>
-        </p:cNvPr>
-        <p:cNvGrpSpPr/>
-        <p:nvPr/>
-      </p:nvGrpSpPr>
-      <p:grpSpPr>
-        <a:xfrm>
-          <a:off x="0" y="0"/>
-          <a:ext cx="0" cy="0"/>
-          <a:chOff x="0" y="0"/>
-          <a:chExt cx="0" cy="0"/>
-        </a:xfrm>
-      </p:grpSpPr>
-      <p:sp useBgFill="1">
-        <p:nvSpPr>
-          <p:cNvPr id="8" name="Rectangle 7">
-            <a:extLst>
-              <a:ext uri="{FF2B5EF4-FFF2-40B4-BE49-F238E27FC236}">
-                <a16:creationId xmlns:a16="http://schemas.microsoft.com/office/drawing/2014/main" id="{9EDC4742-3D24-FAE0-DDBF-4C813EE8A049}"/>
-              </a:ext>
-              <a:ext uri="{C183D7F6-B498-43B3-948B-1728B52AA6E4}">
-                <adec:decorative xmlns:adec="http://schemas.microsoft.com/office/drawing/2017/decorative" val="1"/>
-              </a:ext>
-            </a:extLst>
-          </p:cNvPr>
-          <p:cNvSpPr>
-            <a:spLocks noGrp="1" noRot="1" noChangeAspect="1" noMove="1" noResize="1" noEditPoints="1" noAdjustHandles="1" noChangeArrowheads="1" noChangeShapeType="1" noTextEdit="1"/>
-          </p:cNvSpPr>
-          <p:nvPr>
-            <p:extLst>
-              <p:ext uri="{386F3935-93C4-4BCD-93E2-E3B085C9AB24}">
-                <p16:designElem xmlns:p16="http://schemas.microsoft.com/office/powerpoint/2015/main" val="1"/>
-              </p:ext>
-            </p:extLst>
-          </p:nvPr>
-        </p:nvSpPr>
-        <p:spPr>
-          <a:xfrm>
-            <a:off x="0" y="0"/>
-            <a:ext cx="12192000" cy="6858000"/>
-          </a:xfrm>
-          <a:prstGeom prst="rect">
-            <a:avLst/>
-          </a:prstGeom>
-          <a:ln w="12700" cap="flat" cmpd="sng" algn="ctr">
-            <a:noFill/>
-            <a:prstDash val="solid"/>
-            <a:miter lim="800000"/>
-          </a:ln>
-          <a:effectLst/>
-        </p:spPr>
-        <p:style>
-          <a:lnRef idx="2">
-            <a:schemeClr val="accent1">
-              <a:shade val="15000"/>
-            </a:schemeClr>
-          </a:lnRef>
-          <a:fillRef idx="1">
-            <a:schemeClr val="accent1"/>
-          </a:fillRef>
-          <a:effectRef idx="0">
-            <a:schemeClr val="accent1"/>
-          </a:effectRef>
-          <a:fontRef idx="minor">
-            <a:schemeClr val="lt1"/>
-          </a:fontRef>
-        </p:style>
-        <p:txBody>
-          <a:bodyPr rtlCol="0" anchor="ctr"/>
-          <a:lstStyle/>
-          <a:p>
-            <a:pPr marL="0" marR="0" lvl="0" indent="0" algn="ctr" defTabSz="914400" rtl="0" eaLnBrk="1" fontAlgn="auto" latinLnBrk="0" hangingPunct="1">
-              <a:lnSpc>
-                <a:spcPct val="100000"/>
-              </a:lnSpc>
-              <a:spcBef>
-                <a:spcPts val="0"/>
-              </a:spcBef>
-              <a:spcAft>
-                <a:spcPts val="0"/>
-              </a:spcAft>
-              <a:buClrTx/>
-              <a:buSzTx/>
-              <a:buFontTx/>
-              <a:buNone/>
-              <a:tabLst/>
-              <a:defRPr/>
-            </a:pPr>
-            <a:endParaRPr kumimoji="0" lang="en-US" sz="1800" b="0" i="0" u="none" strike="noStrike" kern="1200" cap="none" spc="0" normalizeH="0" baseline="0" noProof="0">
-              <a:ln>
-                <a:noFill/>
-              </a:ln>
-              <a:solidFill>
-                <a:prstClr val="white"/>
-              </a:solidFill>
-              <a:effectLst/>
-              <a:uLnTx/>
-              <a:uFillTx/>
-              <a:latin typeface="Neue Haas Grotesk Text Pro"/>
-              <a:ea typeface="+mn-ea"/>
-              <a:cs typeface="+mn-cs"/>
-            </a:endParaRPr>
-          </a:p>
-        </p:txBody>
-      </p:sp>
-      <p:sp>
-        <p:nvSpPr>
-          <p:cNvPr id="2" name="Title 1">
-            <a:extLst>
-              <a:ext uri="{FF2B5EF4-FFF2-40B4-BE49-F238E27FC236}">
-                <a16:creationId xmlns:a16="http://schemas.microsoft.com/office/drawing/2014/main" id="{AD53C103-9948-FEF6-C6CB-380D247F6FEC}"/>
-              </a:ext>
-            </a:extLst>
-          </p:cNvPr>
-          <p:cNvSpPr>
-            <a:spLocks noGrp="1"/>
-          </p:cNvSpPr>
-          <p:nvPr>
-            <p:ph type="title"/>
-          </p:nvPr>
-        </p:nvSpPr>
-        <p:spPr>
-          <a:xfrm>
-            <a:off x="277091" y="1814321"/>
-            <a:ext cx="7772400" cy="4560920"/>
-          </a:xfrm>
-        </p:spPr>
-        <p:txBody>
-          <a:bodyPr vert="horz" lIns="91440" tIns="45720" rIns="91440" bIns="45720" rtlCol="0" anchor="b">
-            <a:normAutofit/>
-          </a:bodyPr>
-          <a:lstStyle/>
-          <a:p>
-            <a:r>
-              <a:rPr lang="en-IN" sz="8000" dirty="0"/>
-              <a:t>Agent-Driven Lifecycle (ADLC)</a:t>
-            </a:r>
-            <a:endParaRPr lang="en-US" sz="7400" b="1" dirty="0"/>
-          </a:p>
-        </p:txBody>
-      </p:sp>
-    </p:spTree>
-    <p:extLst>
-      <p:ext uri="{BB962C8B-B14F-4D97-AF65-F5344CB8AC3E}">
-        <p14:creationId xmlns:p14="http://schemas.microsoft.com/office/powerpoint/2010/main" val="1272057228"/>
-      </p:ext>
-    </p:extLst>
-  </p:cSld>
-  <p:clrMapOvr>
-    <a:overrideClrMapping bg1="dk1" tx1="lt1" bg2="dk2" tx2="lt2" accent1="accent1" accent2="accent2" accent3="accent3" accent4="accent4" accent5="accent5" accent6="accent6" hlink="hlink" folHlink="folHlink"/>
   </p:clrMapOvr>
 </p:sld>
 </file>
